--- a/public/templates/office/EMP_ANL_010_벤치마킹분석보고서.pptx
+++ b/public/templates/office/EMP_ANL_010_벤치마킹분석보고서.pptx
@@ -3163,7 +3163,7 @@
               </a:defRPr>
             </a:pPr>
             <a:r>
-              <a:t>HANBIT GLOBAL SyncGuard AI</a:t>
+              <a:t>HANBIT GLOBAL SyncFlow AI</a:t>
             </a:r>
           </a:p>
           <a:p>
@@ -3193,7 +3193,7 @@
               </a:defRPr>
             </a:pPr>
             <a:r>
-              <a:t>국내외 제품 표시·광고 규제 심의 및 AI 기반 문안 검토 선진 사례 비교 분석</a:t>
+              <a:t>국내외 구매계약·기술규격 규제 검증 및 AI 기반 계약 검토 선진 사례 비교 분석</a:t>
             </a:r>
           </a:p>
         </p:txBody>
@@ -3213,7 +3213,7 @@
             <a:avLst/>
           </a:prstGeom>
           <a:solidFill>
-            <a:srgbClr val="1E293B"/>
+            <a:srgbClr val="0F2942"/>
           </a:solidFill>
         </p:spPr>
         <p:style>
@@ -3280,7 +3280,7 @@
               </a:defRPr>
             </a:pPr>
             <a:r>
-              <a:t>분석 대상: 글로벌 뷰티 선도 기업(L사, E사) 심의 체계, 식약처 모니터링 시스템, AI LLM 기반 법률 컴플라이언스</a:t>
+              <a:t>분석 대상: 글로벌 모빌리티·전장 선도 기업(B사, C사) 검증 체계, 공정위·표준원 모니터링 시스템, AI LLM 기반 법률 컴플라이언스</a:t>
             </a:r>
           </a:p>
           <a:p>
@@ -3425,7 +3425,7 @@
               </a:defRPr>
             </a:pPr>
             <a:r>
-              <a:t>1.1 국내외 AI 컴플라이언스 및 표시광고 심의 동향</a:t>
+              <a:t>1.1 국내외 AI 컴플라이언스 및 계약·기술규격 검증 동향</a:t>
             </a:r>
           </a:p>
         </p:txBody>
@@ -3455,7 +3455,7 @@
             <a:pPr algn="r">
               <a:defRPr sz="1000" b="1">
                 <a:solidFill>
-                  <a:srgbClr val="1E293B"/>
+                  <a:srgbClr val="0F2942"/>
                 </a:solidFill>
               </a:defRPr>
             </a:pPr>
@@ -3540,7 +3540,7 @@
               </a:defRPr>
             </a:pPr>
             <a:r>
-              <a:t>SyncGuard AI | 벤치마킹 보고서</a:t>
+              <a:t>SyncFlow AI | 벤치마킹 보고서</a:t>
             </a:r>
           </a:p>
         </p:txBody>
@@ -3686,7 +3686,7 @@
               </a:defRPr>
             </a:pPr>
             <a:r>
-              <a:t>글로벌 뷰티 A사</a:t>
+              <a:t>글로벌 전장부품 A사</a:t>
             </a:r>
           </a:p>
           <a:p>
@@ -3711,12 +3711,12 @@
               </a:spcBef>
               <a:defRPr sz="1000">
                 <a:solidFill>
-                  <a:srgbClr val="334155"/>
-                </a:solidFill>
-              </a:defRPr>
-            </a:pPr>
-            <a:r>
-              <a:t>FDA/EU 코스메틱 규제 데이터베이스와 LLM을 결합하여 성분별 클레임 유효성을 실시간 검증하는 시스템 도입</a:t>
+                  <a:srgbClr val="1E3A5F"/>
+                </a:solidFill>
+              </a:defRPr>
+            </a:pPr>
+            <a:r>
+              <a:t>ISO/IATF 16949 및 EU RoHS/REACH 기술규격 데이터베이스와 LLM을 결합하여 성분별 규격·계약 유효성을 실시간 검증하는 시스템 도입</a:t>
             </a:r>
           </a:p>
         </p:txBody>
@@ -3796,7 +3796,7 @@
               </a:defRPr>
             </a:pPr>
             <a:r>
-              <a:t>글로벌 뷰티 B사</a:t>
+              <a:t>글로벌 모빌리티 B사</a:t>
             </a:r>
           </a:p>
           <a:p>
@@ -3811,7 +3811,7 @@
               </a:defRPr>
             </a:pPr>
             <a:r>
-              <a:t>사전 문구 추천 엔진</a:t>
+              <a:t>사전 조항 추천 엔진</a:t>
             </a:r>
           </a:p>
           <a:p>
@@ -3821,12 +3821,12 @@
               </a:spcBef>
               <a:defRPr sz="1000">
                 <a:solidFill>
-                  <a:srgbClr val="334155"/>
-                </a:solidFill>
-              </a:defRPr>
-            </a:pPr>
-            <a:r>
-              <a:t>금지어 발생 시 대체 가능한 마케팅 카피를 AI가 3가지 옵션으로 자동 제시하여 기획자 편의성 제고</a:t>
+                  <a:srgbClr val="1E3A5F"/>
+                </a:solidFill>
+              </a:defRPr>
+            </a:pPr>
+            <a:r>
+              <a:t>독소조항 발생 시 대체 가능한 구매조달 조항를 AI가 3가지 옵션으로 자동 제시하여 기획자 편의성 제고</a:t>
             </a:r>
           </a:p>
         </p:txBody>
@@ -3906,7 +3906,7 @@
               </a:defRPr>
             </a:pPr>
             <a:r>
-              <a:t>국내 식약처 모니터링</a:t>
+              <a:t>국내 공정위·표준원 모니터링</a:t>
             </a:r>
           </a:p>
           <a:p>
@@ -3931,12 +3931,12 @@
               </a:spcBef>
               <a:defRPr sz="1000">
                 <a:solidFill>
-                  <a:srgbClr val="334155"/>
-                </a:solidFill>
-              </a:defRPr>
-            </a:pPr>
-            <a:r>
-              <a:t>온라인 이커머스 상세페이지 이미지 텍스트를 OCR로 추출하고 의약품 오인성 표현을 자동 필터링하는 관제망 운영</a:t>
+                  <a:srgbClr val="1E3A5F"/>
+                </a:solidFill>
+              </a:defRPr>
+            </a:pPr>
+            <a:r>
+              <a:t>글로벌 공급망 전자계약서 이미지 텍스트를 OCR로 추출하고 불공정 독소조항성 표현을 자동 필터링하는 관제망 운영</a:t>
             </a:r>
           </a:p>
         </p:txBody>
@@ -4031,7 +4031,7 @@
               </a:defRPr>
             </a:pPr>
             <a:r>
-              <a:t>다단계 AI 종합 심의</a:t>
+              <a:t>다단계 AI 종합 검증</a:t>
             </a:r>
           </a:p>
           <a:p>
@@ -4041,12 +4041,12 @@
               </a:spcBef>
               <a:defRPr sz="1000">
                 <a:solidFill>
-                  <a:srgbClr val="334155"/>
-                </a:solidFill>
-              </a:defRPr>
-            </a:pPr>
-            <a:r>
-              <a:t>사내 원료 규격(ProductLab) + 100개 룰셋 + 식약처 법령 RAG + LLM 4단계 판정 및 즉시 대체어 제시 일원화</a:t>
+                  <a:srgbClr val="1E3A5F"/>
+                </a:solidFill>
+              </a:defRPr>
+            </a:pPr>
+            <a:r>
+              <a:t>사내 원소재 규격(PLM-Nexus) + 100개 룰셋 + 공정위·표준원 법령 RAG + LLM 4단계 판정 및 즉시 표준대안 제시 일원화</a:t>
             </a:r>
           </a:p>
         </p:txBody>
@@ -4179,7 +4179,7 @@
               </a:defRPr>
             </a:pPr>
             <a:r>
-              <a:t>2.1 심의 방식 및 주요 기능별 상세 비교</a:t>
+              <a:t>2.1 검증 방식 및 주요 기능별 상세 비교</a:t>
             </a:r>
           </a:p>
         </p:txBody>
@@ -4209,7 +4209,7 @@
             <a:pPr algn="r">
               <a:defRPr sz="1000" b="1">
                 <a:solidFill>
-                  <a:srgbClr val="1E293B"/>
+                  <a:srgbClr val="0F2942"/>
                 </a:solidFill>
               </a:defRPr>
             </a:pPr>
@@ -4294,7 +4294,7 @@
               </a:defRPr>
             </a:pPr>
             <a:r>
-              <a:t>SyncGuard AI | 벤치마킹 보고서</a:t>
+              <a:t>SyncFlow AI | 벤치마킹 보고서</a:t>
             </a:r>
           </a:p>
         </p:txBody>
@@ -4427,7 +4427,7 @@
                         </a:defRPr>
                       </a:pPr>
                       <a:r>
-                        <a:t>기존 수동 심의 (AS-IS)</a:t>
+                        <a:t>기존 수동 검증 (AS-IS)</a:t>
                       </a:r>
                     </a:p>
                   </a:txBody>
@@ -4473,7 +4473,7 @@
                         </a:defRPr>
                       </a:pPr>
                       <a:r>
-                        <a:t>식약처 모니터링망</a:t>
+                        <a:t>공정위·표준원 모니터링망</a:t>
                       </a:r>
                     </a:p>
                   </a:txBody>
@@ -4496,7 +4496,7 @@
                         </a:defRPr>
                       </a:pPr>
                       <a:r>
-                        <a:t>SyncGuard AI</a:t>
+                        <a:t>SyncFlow AI</a:t>
                       </a:r>
                     </a:p>
                   </a:txBody>
@@ -4516,12 +4516,12 @@
                       <a:pPr>
                         <a:defRPr sz="950" b="1">
                           <a:solidFill>
-                            <a:srgbClr val="1E293B"/>
+                            <a:srgbClr val="0F2942"/>
                           </a:solidFill>
                         </a:defRPr>
                       </a:pPr>
                       <a:r>
-                        <a:t>심의 소요 시간</a:t>
+                        <a:t>검증 소요 시간</a:t>
                       </a:r>
                     </a:p>
                   </a:txBody>
@@ -4539,7 +4539,7 @@
                       <a:pPr algn="ctr">
                         <a:defRPr sz="950">
                           <a:solidFill>
-                            <a:srgbClr val="334155"/>
+                            <a:srgbClr val="1E3A5F"/>
                           </a:solidFill>
                         </a:defRPr>
                       </a:pPr>
@@ -4562,7 +4562,7 @@
                       <a:pPr algn="ctr">
                         <a:defRPr sz="950">
                           <a:solidFill>
-                            <a:srgbClr val="334155"/>
+                            <a:srgbClr val="1E3A5F"/>
                           </a:solidFill>
                         </a:defRPr>
                       </a:pPr>
@@ -4585,7 +4585,7 @@
                       <a:pPr algn="ctr">
                         <a:defRPr sz="950">
                           <a:solidFill>
-                            <a:srgbClr val="334155"/>
+                            <a:srgbClr val="1E3A5F"/>
                           </a:solidFill>
                         </a:defRPr>
                       </a:pPr>
@@ -4633,7 +4633,7 @@
                       <a:pPr>
                         <a:defRPr sz="950" b="1">
                           <a:solidFill>
-                            <a:srgbClr val="1E293B"/>
+                            <a:srgbClr val="0F2942"/>
                           </a:solidFill>
                         </a:defRPr>
                       </a:pPr>
@@ -4656,7 +4656,7 @@
                       <a:pPr algn="ctr">
                         <a:defRPr sz="950">
                           <a:solidFill>
-                            <a:srgbClr val="334155"/>
+                            <a:srgbClr val="1E3A5F"/>
                           </a:solidFill>
                         </a:defRPr>
                       </a:pPr>
@@ -4679,7 +4679,7 @@
                       <a:pPr algn="ctr">
                         <a:defRPr sz="950">
                           <a:solidFill>
-                            <a:srgbClr val="334155"/>
+                            <a:srgbClr val="1E3A5F"/>
                           </a:solidFill>
                         </a:defRPr>
                       </a:pPr>
@@ -4702,7 +4702,7 @@
                       <a:pPr algn="ctr">
                         <a:defRPr sz="950">
                           <a:solidFill>
-                            <a:srgbClr val="334155"/>
+                            <a:srgbClr val="1E3A5F"/>
                           </a:solidFill>
                         </a:defRPr>
                       </a:pPr>
@@ -4750,12 +4750,12 @@
                       <a:pPr>
                         <a:defRPr sz="950" b="1">
                           <a:solidFill>
-                            <a:srgbClr val="1E293B"/>
+                            <a:srgbClr val="0F2942"/>
                           </a:solidFill>
                         </a:defRPr>
                       </a:pPr>
                       <a:r>
-                        <a:t>사내 원료 규격 연계</a:t>
+                        <a:t>사내 원소재 규격 연계</a:t>
                       </a:r>
                     </a:p>
                   </a:txBody>
@@ -4773,12 +4773,12 @@
                       <a:pPr algn="ctr">
                         <a:defRPr sz="950">
                           <a:solidFill>
-                            <a:srgbClr val="334155"/>
+                            <a:srgbClr val="1E3A5F"/>
                           </a:solidFill>
                         </a:defRPr>
                       </a:pPr>
                       <a:r>
-                        <a:t>수동 ProductLab 검색</a:t>
+                        <a:t>수동 PLM-Nexus 검색</a:t>
                       </a:r>
                     </a:p>
                   </a:txBody>
@@ -4796,7 +4796,7 @@
                       <a:pPr algn="ctr">
                         <a:defRPr sz="950">
                           <a:solidFill>
-                            <a:srgbClr val="334155"/>
+                            <a:srgbClr val="1E3A5F"/>
                           </a:solidFill>
                         </a:defRPr>
                       </a:pPr>
@@ -4819,7 +4819,7 @@
                       <a:pPr algn="ctr">
                         <a:defRPr sz="950">
                           <a:solidFill>
-                            <a:srgbClr val="334155"/>
+                            <a:srgbClr val="1E3A5F"/>
                           </a:solidFill>
                         </a:defRPr>
                       </a:pPr>
@@ -4847,7 +4847,7 @@
                         </a:defRPr>
                       </a:pPr>
                       <a:r>
-                        <a:t>ProductLab REST API 실시간 연동</a:t>
+                        <a:t>PLM-Nexus REST API 실시간 연동</a:t>
                       </a:r>
                     </a:p>
                   </a:txBody>
@@ -4867,12 +4867,12 @@
                       <a:pPr>
                         <a:defRPr sz="950" b="1">
                           <a:solidFill>
-                            <a:srgbClr val="1E293B"/>
+                            <a:srgbClr val="0F2942"/>
                           </a:solidFill>
                         </a:defRPr>
                       </a:pPr>
                       <a:r>
-                        <a:t>대체 문구 추천</a:t>
+                        <a:t>대체 조항 추천</a:t>
                       </a:r>
                     </a:p>
                   </a:txBody>
@@ -4890,12 +4890,12 @@
                       <a:pPr algn="ctr">
                         <a:defRPr sz="950">
                           <a:solidFill>
-                            <a:srgbClr val="334155"/>
+                            <a:srgbClr val="1E3A5F"/>
                           </a:solidFill>
                         </a:defRPr>
                       </a:pPr>
                       <a:r>
-                        <a:t>RA 담당자 수기 작성</a:t>
+                        <a:t>법무·QA 담당자 수기 작성</a:t>
                       </a:r>
                     </a:p>
                   </a:txBody>
@@ -4913,7 +4913,7 @@
                       <a:pPr algn="ctr">
                         <a:defRPr sz="950">
                           <a:solidFill>
-                            <a:srgbClr val="334155"/>
+                            <a:srgbClr val="1E3A5F"/>
                           </a:solidFill>
                         </a:defRPr>
                       </a:pPr>
@@ -4936,7 +4936,7 @@
                       <a:pPr algn="ctr">
                         <a:defRPr sz="950">
                           <a:solidFill>
-                            <a:srgbClr val="334155"/>
+                            <a:srgbClr val="1E3A5F"/>
                           </a:solidFill>
                         </a:defRPr>
                       </a:pPr>
@@ -4984,7 +4984,7 @@
                       <a:pPr>
                         <a:defRPr sz="950" b="1">
                           <a:solidFill>
-                            <a:srgbClr val="1E293B"/>
+                            <a:srgbClr val="0F2942"/>
                           </a:solidFill>
                         </a:defRPr>
                       </a:pPr>
@@ -5007,7 +5007,7 @@
                       <a:pPr algn="ctr">
                         <a:defRPr sz="950">
                           <a:solidFill>
-                            <a:srgbClr val="334155"/>
+                            <a:srgbClr val="1E3A5F"/>
                           </a:solidFill>
                         </a:defRPr>
                       </a:pPr>
@@ -5030,7 +5030,7 @@
                       <a:pPr algn="ctr">
                         <a:defRPr sz="950">
                           <a:solidFill>
-                            <a:srgbClr val="334155"/>
+                            <a:srgbClr val="1E3A5F"/>
                           </a:solidFill>
                         </a:defRPr>
                       </a:pPr>
@@ -5053,7 +5053,7 @@
                       <a:pPr algn="ctr">
                         <a:defRPr sz="950">
                           <a:solidFill>
-                            <a:srgbClr val="334155"/>
+                            <a:srgbClr val="1E3A5F"/>
                           </a:solidFill>
                         </a:defRPr>
                       </a:pPr>
@@ -5224,7 +5224,7 @@
               </a:defRPr>
             </a:pPr>
             <a:r>
-              <a:t>3.1 한빛글로벌 특화 AI 심의 시스템 요구 정의</a:t>
+              <a:t>3.1 한빛글로벌 특화 AI 검증 시스템 요구 정의</a:t>
             </a:r>
           </a:p>
         </p:txBody>
@@ -5254,7 +5254,7 @@
             <a:pPr algn="r">
               <a:defRPr sz="1000" b="1">
                 <a:solidFill>
-                  <a:srgbClr val="1E293B"/>
+                  <a:srgbClr val="0F2942"/>
                 </a:solidFill>
               </a:defRPr>
             </a:pPr>
@@ -5339,7 +5339,7 @@
               </a:defRPr>
             </a:pPr>
             <a:r>
-              <a:t>SyncGuard AI | 벤치마킹 보고서</a:t>
+              <a:t>SyncFlow AI | 벤치마킹 보고서</a:t>
             </a:r>
           </a:p>
         </p:txBody>
@@ -5485,7 +5485,7 @@
               </a:defRPr>
             </a:pPr>
             <a:r>
-              <a:t>1. 국내 표시·광고 공정화법 제3조 특화 엔진 필요</a:t>
+              <a:t>1. 국내 하도급법 제3조의4 특화 엔진 필요</a:t>
             </a:r>
           </a:p>
           <a:p>
@@ -5495,12 +5495,12 @@
               </a:spcBef>
               <a:defRPr sz="950">
                 <a:solidFill>
-                  <a:srgbClr val="334155"/>
-                </a:solidFill>
-              </a:defRPr>
-            </a:pPr>
-            <a:r>
-              <a:t>• 해외 툴은 국내 식약처의 세부 관리지침(의약품 오인, 기능성 고시, 천연/유기농 기준)을 충족하지 못함.</a:t>
+                  <a:srgbClr val="1E3A5F"/>
+                </a:solidFill>
+              </a:defRPr>
+            </a:pPr>
+            <a:r>
+              <a:t>• 해외 툴은 국내 공정위·표준원의 세부 관리지침(불공정 독소조항, 핵심규격 고시, EU RoHS/REACH 환경규제 기준)을 충족하지 못함.</a:t>
             </a:r>
           </a:p>
           <a:p>
@@ -5510,12 +5510,12 @@
               </a:spcBef>
               <a:defRPr sz="950">
                 <a:solidFill>
-                  <a:srgbClr val="334155"/>
-                </a:solidFill>
-              </a:defRPr>
-            </a:pPr>
-            <a:r>
-              <a:t>• 식약처 100대 금지/주의 표현 및 최신 행정처분 사례를 학습한 한국형 특화 룰셋 구축 필수.</a:t>
+                  <a:srgbClr val="1E3A5F"/>
+                </a:solidFill>
+              </a:defRPr>
+            </a:pPr>
+            <a:r>
+              <a:t>• 공정위·표준원 100대 금지/주의 표현 및 최신 불공정 심결 사례를 학습한 한국형 특화 룰셋 구축 필수.</a:t>
             </a:r>
           </a:p>
         </p:txBody>
@@ -5595,7 +5595,7 @@
               </a:defRPr>
             </a:pPr>
             <a:r>
-              <a:t>2. 배합 성분 데이터(ProductLab)와의 유기적 결합</a:t>
+              <a:t>2. 조성 성분 데이터(PLM-Nexus)와의 유기적 결합</a:t>
             </a:r>
           </a:p>
           <a:p>
@@ -5605,12 +5605,12 @@
               </a:spcBef>
               <a:defRPr sz="950">
                 <a:solidFill>
-                  <a:srgbClr val="334155"/>
-                </a:solidFill>
-              </a:defRPr>
-            </a:pPr>
-            <a:r>
-              <a:t>• 클레임의 타당성은 제품에 실제 함유된 원료 성분 및 배합 함량과 직결됨.</a:t>
+                  <a:srgbClr val="1E3A5F"/>
+                </a:solidFill>
+              </a:defRPr>
+            </a:pPr>
+            <a:r>
+              <a:t>• 규격·계약의 타당성은 제품에 실제 함유된 원소재 성분 및 조성 함량과 직결됨.</a:t>
             </a:r>
           </a:p>
           <a:p>
@@ -5620,12 +5620,12 @@
               </a:spcBef>
               <a:defRPr sz="950">
                 <a:solidFill>
-                  <a:srgbClr val="334155"/>
-                </a:solidFill>
-              </a:defRPr>
-            </a:pPr>
-            <a:r>
-              <a:t>• 사내 ProductLab 시스템과 실시간 API를 연동하여 '해당 성분이 실제로 포함되어 있는지' 즉시 자동 검증 필요.</a:t>
+                  <a:srgbClr val="1E3A5F"/>
+                </a:solidFill>
+              </a:defRPr>
+            </a:pPr>
+            <a:r>
+              <a:t>• 사내 PLM-Nexus 시스템과 실시간 API를 연동하여 '해당 성분이 실제로 포함되어 있는지' 즉시 자동 검증 필요.</a:t>
             </a:r>
           </a:p>
         </p:txBody>
@@ -5705,7 +5705,7 @@
               </a:defRPr>
             </a:pPr>
             <a:r>
-              <a:t>3. 단순 차단이 아닌 '대체 카피 제시형' AI</a:t>
+              <a:t>3. 단순 차단이 아닌 '대체 조항 제시형' AI</a:t>
             </a:r>
           </a:p>
           <a:p>
@@ -5715,12 +5715,12 @@
               </a:spcBef>
               <a:defRPr sz="950">
                 <a:solidFill>
-                  <a:srgbClr val="334155"/>
-                </a:solidFill>
-              </a:defRPr>
-            </a:pPr>
-            <a:r>
-              <a:t>• 마케팅 실무진에게 '금지' 통보만 할 경우 캠페인 일정이 지연되고 저항이 발생함.</a:t>
+                  <a:srgbClr val="1E3A5F"/>
+                </a:solidFill>
+              </a:defRPr>
+            </a:pPr>
+            <a:r>
+              <a:t>• 구매조달 실무진에게 '금지' 통보만 할 경우 조달프로젝트 일정이 지연되고 저항이 발생함.</a:t>
             </a:r>
           </a:p>
           <a:p>
@@ -5730,12 +5730,12 @@
               </a:spcBef>
               <a:defRPr sz="950">
                 <a:solidFill>
-                  <a:srgbClr val="334155"/>
-                </a:solidFill>
-              </a:defRPr>
-            </a:pPr>
-            <a:r>
-              <a:t>• 적법하면서도 마케팅 소구력을 유지하는 '대체 추천 문구'를 함께 제공하는 능동형 AI 필요.</a:t>
+                  <a:srgbClr val="1E3A5F"/>
+                </a:solidFill>
+              </a:defRPr>
+            </a:pPr>
+            <a:r>
+              <a:t>• 적법하면서도 구매조달 기술사양력을 유지하는 '대체 추천 조항'를 함께 제공하는 능동형 AI 필요.</a:t>
             </a:r>
           </a:p>
         </p:txBody>
@@ -5815,7 +5815,7 @@
               </a:defRPr>
             </a:pPr>
             <a:r>
-              <a:t>4. 실무자-RA 간 양방향 커뮤니케이션 포털</a:t>
+              <a:t>4. 실무자-QA 간 양방향 커뮤니케이션 포털</a:t>
             </a:r>
           </a:p>
           <a:p>
@@ -5825,12 +5825,12 @@
               </a:spcBef>
               <a:defRPr sz="950">
                 <a:solidFill>
-                  <a:srgbClr val="334155"/>
-                </a:solidFill>
-              </a:defRPr>
-            </a:pPr>
-            <a:r>
-              <a:t>• 파편화된 이메일 소통을 단일 웹 포털로 일원화하여 심의 히스토리와 수정 이력을 자산화.</a:t>
+                  <a:srgbClr val="1E3A5F"/>
+                </a:solidFill>
+              </a:defRPr>
+            </a:pPr>
+            <a:r>
+              <a:t>• 파편화된 이메일 소통을 단일 웹 포털로 일원화하여 검증 히스토리와 수정 이력을 자산화.</a:t>
             </a:r>
           </a:p>
           <a:p>
@@ -5840,12 +5840,12 @@
               </a:spcBef>
               <a:defRPr sz="950">
                 <a:solidFill>
-                  <a:srgbClr val="334155"/>
-                </a:solidFill>
-              </a:defRPr>
-            </a:pPr>
-            <a:r>
-              <a:t>• Vben Admin 기반 직관적 반응형 UI를 통해 마케터와 RA가 동일 화면에서 코멘트와 결재를 수행.</a:t>
+                  <a:srgbClr val="1E3A5F"/>
+                </a:solidFill>
+              </a:defRPr>
+            </a:pPr>
+            <a:r>
+              <a:t>• Vben Admin 기반 직관적 반응형 UI를 통해 구매담당자와 QA가 동일 화면에서 코멘트와 결재를 수행.</a:t>
             </a:r>
           </a:p>
         </p:txBody>
@@ -6008,7 +6008,7 @@
             <a:pPr algn="r">
               <a:defRPr sz="1000" b="1">
                 <a:solidFill>
-                  <a:srgbClr val="1E293B"/>
+                  <a:srgbClr val="0F2942"/>
                 </a:solidFill>
               </a:defRPr>
             </a:pPr>
@@ -6093,7 +6093,7 @@
               </a:defRPr>
             </a:pPr>
             <a:r>
-              <a:t>SyncGuard AI | 벤치마킹 보고서</a:t>
+              <a:t>SyncFlow AI | 벤치마킹 보고서</a:t>
             </a:r>
           </a:p>
         </p:txBody>
@@ -6239,7 +6239,7 @@
               </a:defRPr>
             </a:pPr>
             <a:r>
-              <a:t>■ 벤치마킹 결과를 반영한 SyncGuard AI 핵심 기능 설계</a:t>
+              <a:t>■ 벤치마킹 결과를 반영한 SyncFlow AI 핵심 기능 설계</a:t>
             </a:r>
           </a:p>
           <a:p>
@@ -6249,12 +6249,12 @@
               </a:spcBef>
               <a:defRPr sz="1000">
                 <a:solidFill>
-                  <a:srgbClr val="334155"/>
-                </a:solidFill>
-              </a:defRPr>
-            </a:pPr>
-            <a:r>
-              <a:t>✔ 규칙 사전(Rule Dictionary) 100종 구축: 식약처 고시 금지어 50종, 주의어 30종, 예외 단어 20종을 DB화하여 0.2초 내 즉시 1차 필터링.</a:t>
+                  <a:srgbClr val="1E3A5F"/>
+                </a:solidFill>
+              </a:defRPr>
+            </a:pPr>
+            <a:r>
+              <a:t>✔ 규칙 사전(Rule Dictionary) 100종 구축: 공정위·표준원 고시 독소조항 50종, 보완조항 30종, 예외 단어 20종을 DB화하여 0.2초 내 즉시 1차 필터링.</a:t>
             </a:r>
           </a:p>
           <a:p>
@@ -6264,12 +6264,12 @@
               </a:spcBef>
               <a:defRPr sz="1000">
                 <a:solidFill>
-                  <a:srgbClr val="334155"/>
-                </a:solidFill>
-              </a:defRPr>
-            </a:pPr>
-            <a:r>
-              <a:t>✔ 식약처 법령 및 심의 가이드라인 RAG 벡터 검색: 표시·광고 공정화법 제3조 및 유권해석 문서를 pgvector에 임베딩하여 판정 근거 조항 자동 매핑.</a:t>
+                  <a:srgbClr val="1E3A5F"/>
+                </a:solidFill>
+              </a:defRPr>
+            </a:pPr>
+            <a:r>
+              <a:t>✔ 공정위·표준원 법령 및 검증 가이드라인 RAG 벡터 검색: 하도급법 제3조의4 및 유권해석 문서를 pgvector에 임베딩하여 판정 근거 조항 자동 매핑.</a:t>
             </a:r>
           </a:p>
           <a:p>
@@ -6279,12 +6279,12 @@
               </a:spcBef>
               <a:defRPr sz="1000">
                 <a:solidFill>
-                  <a:srgbClr val="334155"/>
-                </a:solidFill>
-              </a:defRPr>
-            </a:pPr>
-            <a:r>
-              <a:t>✔ Vision OCR 기반 PDP 상세페이지 분석: 이미지 파일 업로드 시 텍스트 위치(Bounding Box)와 위반 의심 구역을 시각적으로 하이라이트.</a:t>
+                  <a:srgbClr val="1E3A5F"/>
+                </a:solidFill>
+              </a:defRPr>
+            </a:pPr>
+            <a:r>
+              <a:t>✔ Vision OCR 기반 스캔 기술시방서 분석: 이미지 파일 업로드 시 텍스트 위치(Bounding Box)와 위반 의심 구역을 시각적으로 하이라이트.</a:t>
             </a:r>
           </a:p>
           <a:p>
@@ -6294,12 +6294,12 @@
               </a:spcBef>
               <a:defRPr sz="1000">
                 <a:solidFill>
-                  <a:srgbClr val="334155"/>
-                </a:solidFill>
-              </a:defRPr>
-            </a:pPr>
-            <a:r>
-              <a:t>✔ ProductLab 배합 성분 규격 연계: 제품 코드 입력 시 ProductLab REST API를 호출하여 배합 성분 리스트를 AI 판정 프롬프트에 자동 주입.</a:t>
+                  <a:srgbClr val="1E3A5F"/>
+                </a:solidFill>
+              </a:defRPr>
+            </a:pPr>
+            <a:r>
+              <a:t>✔ PLM-Nexus 조성 성분 규격 연계: 제품 코드 입력 시 PLM-Nexus REST API를 호출하여 조성 성분 리스트를 AI 판정 프롬프트에 자동 주입.</a:t>
             </a:r>
           </a:p>
           <a:p>
@@ -6309,12 +6309,12 @@
               </a:spcBef>
               <a:defRPr sz="1000">
                 <a:solidFill>
-                  <a:srgbClr val="334155"/>
-                </a:solidFill>
-              </a:defRPr>
-            </a:pPr>
-            <a:r>
-              <a:t>✔ 대체 추천 문구 엔진 탑재: 허위·과대 소구 표현을 적법한 마케팅 표현으로 변환해주는 100종 대체 문구 데이터베이스 구축.</a:t>
+                  <a:srgbClr val="1E3A5F"/>
+                </a:solidFill>
+              </a:defRPr>
+            </a:pPr>
+            <a:r>
+              <a:t>✔ 대체 추천 조항 엔진 탑재: 허위·과대 기술사양 표현을 적법한 구매조달 표현으로 변환해주는 100종 대체 조항 데이터베이스 구축.</a:t>
             </a:r>
           </a:p>
         </p:txBody>
@@ -6477,7 +6477,7 @@
             <a:pPr algn="r">
               <a:defRPr sz="1000" b="1">
                 <a:solidFill>
-                  <a:srgbClr val="1E293B"/>
+                  <a:srgbClr val="0F2942"/>
                 </a:solidFill>
               </a:defRPr>
             </a:pPr>
@@ -6562,7 +6562,7 @@
               </a:defRPr>
             </a:pPr>
             <a:r>
-              <a:t>SyncGuard AI | 벤치마킹 보고서</a:t>
+              <a:t>SyncFlow AI | 벤치마킹 보고서</a:t>
             </a:r>
           </a:p>
         </p:txBody>
@@ -6703,12 +6703,12 @@
             <a:pPr>
               <a:defRPr b="1" sz="1200">
                 <a:solidFill>
-                  <a:srgbClr val="1E293B"/>
-                </a:solidFill>
-              </a:defRPr>
-            </a:pPr>
-            <a:r>
-              <a:t>심의 리드타임 감축</a:t>
+                  <a:srgbClr val="0F2942"/>
+                </a:solidFill>
+              </a:defRPr>
+            </a:pPr>
+            <a:r>
+              <a:t>검증 리드타임 감축</a:t>
             </a:r>
           </a:p>
           <a:p>
@@ -6733,12 +6733,12 @@
               </a:spcBef>
               <a:defRPr sz="1000">
                 <a:solidFill>
-                  <a:srgbClr val="334155"/>
-                </a:solidFill>
-              </a:defRPr>
-            </a:pPr>
-            <a:r>
-              <a:t>85% 단축으로 마케팅 적시성 확보</a:t>
+                  <a:srgbClr val="1E3A5F"/>
+                </a:solidFill>
+              </a:defRPr>
+            </a:pPr>
+            <a:r>
+              <a:t>85% 단축으로 구매조달 적시성 확보</a:t>
             </a:r>
           </a:p>
         </p:txBody>
@@ -6813,7 +6813,7 @@
             <a:pPr>
               <a:defRPr b="1" sz="1200">
                 <a:solidFill>
-                  <a:srgbClr val="1E293B"/>
+                  <a:srgbClr val="0F2942"/>
                 </a:solidFill>
               </a:defRPr>
             </a:pPr>
@@ -6843,7 +6843,7 @@
               </a:spcBef>
               <a:defRPr sz="1000">
                 <a:solidFill>
-                  <a:srgbClr val="334155"/>
+                  <a:srgbClr val="1E3A5F"/>
                 </a:solidFill>
               </a:defRPr>
             </a:pPr>
@@ -6923,7 +6923,7 @@
             <a:pPr>
               <a:defRPr b="1" sz="1200">
                 <a:solidFill>
-                  <a:srgbClr val="1E293B"/>
+                  <a:srgbClr val="0F2942"/>
                 </a:solidFill>
               </a:defRPr>
             </a:pPr>
@@ -6953,12 +6953,12 @@
               </a:spcBef>
               <a:defRPr sz="1000">
                 <a:solidFill>
-                  <a:srgbClr val="334155"/>
-                </a:solidFill>
-              </a:defRPr>
-            </a:pPr>
-            <a:r>
-              <a:t>식약처 위반 사전 원천 차단</a:t>
+                  <a:srgbClr val="1E3A5F"/>
+                </a:solidFill>
+              </a:defRPr>
+            </a:pPr>
+            <a:r>
+              <a:t>공정위·표준원 위반 사전 원천 차단</a:t>
             </a:r>
           </a:p>
         </p:txBody>
@@ -7033,7 +7033,7 @@
             <a:pPr>
               <a:defRPr b="1" sz="1200">
                 <a:solidFill>
-                  <a:srgbClr val="1E293B"/>
+                  <a:srgbClr val="0F2942"/>
                 </a:solidFill>
               </a:defRPr>
             </a:pPr>
@@ -7063,12 +7063,12 @@
               </a:spcBef>
               <a:defRPr sz="1000">
                 <a:solidFill>
-                  <a:srgbClr val="334155"/>
-                </a:solidFill>
-              </a:defRPr>
-            </a:pPr>
-            <a:r>
-              <a:t>RA 전문가 고부가가치 기획 집중</a:t>
+                  <a:srgbClr val="1E3A5F"/>
+                </a:solidFill>
+              </a:defRPr>
+            </a:pPr>
+            <a:r>
+              <a:t>법무·QA 전문위원 고부가가치 기획 집중</a:t>
             </a:r>
           </a:p>
         </p:txBody>
